--- a/public/fun/pack/pptx/weddingpro/결혼식프리미엄_46_소개중심_로즈쿼츠.pptx
+++ b/public/fun/pack/pptx/weddingpro/결혼식프리미엄_46_소개중심_로즈쿼츠.pptx
@@ -113,12 +113,12 @@
   <p:extLst>
     <p:ext uri="{521415D9-36F7-43E2-AB2F-B90AF26B5E84}">
       <p14:sectionLst xmlns:p14="http://schemas.microsoft.com/office/powerpoint/2010/main">
-        <p14:section name="시작" id="{ED6D8616-AA93-482D-93A1-55F1B7BCDE5E}">
+        <p14:section name="시작" id="{1436364E-804A-4C44-B423-4A30884FDD5E}">
           <p14:sldIdLst>
             <p14:sldId id="256"/>
           </p14:sldIdLst>
         </p14:section>
-        <p14:section name="본문" id="{6BFBA668-FD83-4910-8809-73E5BC2ECC2A}">
+        <p14:section name="본문" id="{31A2246F-9240-4834-8C11-C869BCD7C581}">
           <p14:sldIdLst>
             <p14:sldId id="257"/>
             <p14:sldId id="258"/>
@@ -127,7 +127,7 @@
             <p14:sldId id="261"/>
           </p14:sldIdLst>
         </p14:section>
-        <p14:section name="마무리" id="{5CB432C1-67D3-43E6-9323-3B115A195BE8}">
+        <p14:section name="마무리" id="{DBF5B17A-7F82-4233-8B3B-E34F19B74443}">
           <p14:sldIdLst>
             <p14:sldId id="262"/>
           </p14:sldIdLst>
@@ -1479,7 +1479,7 @@
             </a:lvl1pPr>
           </a:lstStyle>
           <a:p>
-            <a:fld id="{B0095027-7361-4D03-90EF-1C9278439E55}" type="slidenum">
+            <a:fld id="{41A7AEE8-6A7C-47F8-8303-88B3871BE4C1}" type="slidenum">
               <a:rPr lang="en-US"/>
               <a:t>‹#›</a:t>
             </a:fld>
@@ -2138,7 +2138,7 @@
             </a:lvl1pPr>
           </a:lstStyle>
           <a:p>
-            <a:fld id="{4A6D52AF-FFF5-41BC-9F5A-638B69C34878}" type="slidenum">
+            <a:fld id="{FDB78F8A-1530-4342-B05F-190C743BF219}" type="slidenum">
               <a:rPr lang="en-US"/>
               <a:t>‹#›</a:t>
             </a:fld>
@@ -2829,7 +2829,7 @@
             </a:lvl1pPr>
           </a:lstStyle>
           <a:p>
-            <a:fld id="{E5019DB5-A754-44B8-A381-A56E9C4CA63F}" type="slidenum">
+            <a:fld id="{E379EF6A-5CA6-4878-B8A2-046C7FB44EAD}" type="slidenum">
               <a:rPr lang="en-US"/>
               <a:t>‹#›</a:t>
             </a:fld>
@@ -3740,7 +3740,7 @@
           <a:p>
             <a:r>
               <a:rPr lang="ko-KR"/>
-              <a:t>새해 첫 달에 결혼식을 올립니다</a:t>
+              <a:t>작은 예식으로 올립니다</a:t>
             </a:r>
           </a:p>
         </p:txBody>
@@ -3768,7 +3768,7 @@
           <a:p>
             <a:r>
               <a:rPr lang="ko-KR"/>
-              <a:t>0000. 00. 00 · 예식장 이름</a:t>
+              <a:t>날짜 입력 · 예식장 이름</a:t>
             </a:r>
           </a:p>
         </p:txBody>
@@ -3991,7 +3991,7 @@
           <a:bodyPr/>
           <a:lstStyle/>
           <a:p>
-            <a:fld id="{D4F40771-BE2C-4F3F-8DA5-66D2588B9999}" type="slidenum">
+            <a:fld id="{555D31EF-41F9-4E27-804C-7DB00FA096D0}" type="slidenum">
               <a:rPr lang="en-US"/>
               <a:t>‹#›</a:t>
             </a:fld>
@@ -4443,7 +4443,7 @@
           <a:bodyPr/>
           <a:lstStyle/>
           <a:p>
-            <a:fld id="{1E97E688-893A-41B5-8E68-C2E346BC69F1}" type="slidenum">
+            <a:fld id="{B0F01C26-F27B-45C6-ACF2-472B69902FB7}" type="slidenum">
               <a:rPr lang="en-US"/>
               <a:t>‹#›</a:t>
             </a:fld>
@@ -5091,7 +5091,7 @@
           <a:bodyPr/>
           <a:lstStyle/>
           <a:p>
-            <a:fld id="{D57DB0B1-A3A3-4C57-AED9-913F038FCE56}" type="slidenum">
+            <a:fld id="{C73415C2-9F38-419E-B0BE-AA97C4AFBF77}" type="slidenum">
               <a:rPr lang="en-US"/>
               <a:t>‹#›</a:t>
             </a:fld>
@@ -6067,7 +6067,7 @@
           <a:bodyPr/>
           <a:lstStyle/>
           <a:p>
-            <a:fld id="{907348D4-6AE6-41EF-AC2F-28F6D724A84C}" type="slidenum">
+            <a:fld id="{9D3549A4-258B-459D-A14F-9219ED134F26}" type="slidenum">
               <a:rPr lang="en-US"/>
               <a:t>‹#›</a:t>
             </a:fld>
@@ -6155,7 +6155,7 @@
           <a:bodyPr/>
           <a:lstStyle/>
           <a:p>
-            <a:fld id="{C26F248C-AE6A-441B-9D6C-5B93089BBF04}" type="slidenum">
+            <a:fld id="{13CC6506-FE33-4CB5-87D8-FCBED6B9B492}" type="slidenum">
               <a:rPr lang="en-US"/>
               <a:t>‹#›</a:t>
             </a:fld>
